--- a/Phase 3/PHASE 3 ppt.pptx
+++ b/Phase 3/PHASE 3 ppt.pptx
@@ -7,10 +7,10 @@
     <p:sldMasterId id="2147483686" r:id="rId3"/>
   </p:sldMasterIdLst>
   <p:notesMasterIdLst>
-    <p:notesMasterId r:id="rId12"/>
+    <p:notesMasterId r:id="rId13"/>
   </p:notesMasterIdLst>
   <p:handoutMasterIdLst>
-    <p:handoutMasterId r:id="rId13"/>
+    <p:handoutMasterId r:id="rId14"/>
   </p:handoutMasterIdLst>
   <p:sldIdLst>
     <p:sldId id="277" r:id="rId4"/>
@@ -19,8 +19,9 @@
     <p:sldId id="401" r:id="rId7"/>
     <p:sldId id="406" r:id="rId8"/>
     <p:sldId id="402" r:id="rId9"/>
-    <p:sldId id="407" r:id="rId10"/>
-    <p:sldId id="405" r:id="rId11"/>
+    <p:sldId id="408" r:id="rId10"/>
+    <p:sldId id="407" r:id="rId11"/>
+    <p:sldId id="405" r:id="rId12"/>
   </p:sldIdLst>
   <p:sldSz cx="12192000" cy="6858000"/>
   <p:notesSz cx="6858000" cy="9144000"/>
@@ -235,7 +236,7 @@
             <a:fld id="{92CDA8E9-9948-4BC7-A1DE-415AE6D34228}" type="datetimeFigureOut">
               <a:rPr lang="en-US" smtClean="0"/>
               <a:pPr/>
-              <a:t>3/23/2026</a:t>
+              <a:t>3/25/2026</a:t>
             </a:fld>
             <a:endParaRPr lang="en-US"/>
           </a:p>
@@ -403,7 +404,7 @@
             <a:fld id="{95A4AE53-78AB-4E30-A376-70F5FA87A326}" type="datetimeFigureOut">
               <a:rPr lang="en-US" smtClean="0"/>
               <a:pPr/>
-              <a:t>3/23/2026</a:t>
+              <a:t>3/25/2026</a:t>
             </a:fld>
             <a:endParaRPr lang="en-US"/>
           </a:p>
@@ -8217,7 +8218,7 @@
           <a:noFill/>
           <a:extLst>
             <a:ext uri="{909E8E84-426E-40dd-AFC4-6F175D3DCCD1}">
-              <a14:hiddenFill xmlns:a14="http://schemas.microsoft.com/office/drawing/2010/main" xmlns="">
+              <a14:hiddenFill xmlns="" xmlns:a14="http://schemas.microsoft.com/office/drawing/2010/main">
                 <a:solidFill>
                   <a:srgbClr val="FFFFFF"/>
                 </a:solidFill>
@@ -8258,7 +8259,7 @@
           <a:noFill/>
           <a:extLst>
             <a:ext uri="{909E8E84-426E-40dd-AFC4-6F175D3DCCD1}">
-              <a14:hiddenFill xmlns:a14="http://schemas.microsoft.com/office/drawing/2010/main" xmlns="">
+              <a14:hiddenFill xmlns="" xmlns:a14="http://schemas.microsoft.com/office/drawing/2010/main">
                 <a:solidFill>
                   <a:srgbClr val="FFFFFF"/>
                 </a:solidFill>
@@ -8299,7 +8300,7 @@
           <a:noFill/>
           <a:extLst>
             <a:ext uri="{909E8E84-426E-40dd-AFC4-6F175D3DCCD1}">
-              <a14:hiddenFill xmlns:a14="http://schemas.microsoft.com/office/drawing/2010/main" xmlns="">
+              <a14:hiddenFill xmlns="" xmlns:a14="http://schemas.microsoft.com/office/drawing/2010/main">
                 <a:solidFill>
                   <a:srgbClr val="FFFFFF"/>
                 </a:solidFill>
@@ -12318,14 +12319,14 @@
           </a:ln>
           <a:extLst>
             <a:ext uri="{909E8E84-426E-40dd-AFC4-6F175D3DCCD1}">
-              <a14:hiddenFill xmlns:a14="http://schemas.microsoft.com/office/drawing/2010/main" xmlns="">
+              <a14:hiddenFill xmlns="" xmlns:a14="http://schemas.microsoft.com/office/drawing/2010/main">
                 <a:solidFill>
                   <a:srgbClr val="FFFFFF"/>
                 </a:solidFill>
               </a14:hiddenFill>
             </a:ext>
             <a:ext uri="{91240B29-F687-4f45-9708-019B960494DF}">
-              <a14:hiddenLine xmlns:a14="http://schemas.microsoft.com/office/drawing/2010/main" xmlns="" w="9525">
+              <a14:hiddenLine xmlns="" xmlns:a14="http://schemas.microsoft.com/office/drawing/2010/main" w="9525">
                 <a:solidFill>
                   <a:srgbClr val="000000"/>
                 </a:solidFill>
@@ -12562,14 +12563,14 @@
           </a:ln>
           <a:extLst>
             <a:ext uri="{909E8E84-426E-40dd-AFC4-6F175D3DCCD1}">
-              <a14:hiddenFill xmlns:a14="http://schemas.microsoft.com/office/drawing/2010/main" xmlns="">
+              <a14:hiddenFill xmlns="" xmlns:a14="http://schemas.microsoft.com/office/drawing/2010/main">
                 <a:solidFill>
                   <a:srgbClr val="FFFFFF"/>
                 </a:solidFill>
               </a14:hiddenFill>
             </a:ext>
             <a:ext uri="{91240B29-F687-4f45-9708-019B960494DF}">
-              <a14:hiddenLine xmlns:a14="http://schemas.microsoft.com/office/drawing/2010/main" xmlns="" w="9525">
+              <a14:hiddenLine xmlns="" xmlns:a14="http://schemas.microsoft.com/office/drawing/2010/main" w="9525">
                 <a:solidFill>
                   <a:srgbClr val="000000"/>
                 </a:solidFill>
@@ -12736,14 +12737,14 @@
           </a:ln>
           <a:extLst>
             <a:ext uri="{909E8E84-426E-40dd-AFC4-6F175D3DCCD1}">
-              <a14:hiddenFill xmlns:a14="http://schemas.microsoft.com/office/drawing/2010/main" xmlns="">
+              <a14:hiddenFill xmlns="" xmlns:a14="http://schemas.microsoft.com/office/drawing/2010/main">
                 <a:solidFill>
                   <a:srgbClr val="FFFFFF"/>
                 </a:solidFill>
               </a14:hiddenFill>
             </a:ext>
             <a:ext uri="{91240B29-F687-4f45-9708-019B960494DF}">
-              <a14:hiddenLine xmlns:a14="http://schemas.microsoft.com/office/drawing/2010/main" xmlns="" w="9525">
+              <a14:hiddenLine xmlns="" xmlns:a14="http://schemas.microsoft.com/office/drawing/2010/main" w="9525">
                 <a:solidFill>
                   <a:srgbClr val="000000"/>
                 </a:solidFill>
@@ -15960,7 +15961,7 @@
           <p:cNvPr id="2" name="Title 1">
             <a:extLst>
               <a:ext uri="{FF2B5EF4-FFF2-40B4-BE49-F238E27FC236}">
-                <a16:creationId xmlns:a16="http://schemas.microsoft.com/office/drawing/2014/main" id="{28F040A7-B947-66EC-920B-89AACD3F3298}"/>
+                <a16:creationId xmlns:a16="http://schemas.microsoft.com/office/drawing/2014/main" id="{3B8C904B-891D-6923-AB86-735DB4D9B450}"/>
               </a:ext>
             </a:extLst>
           </p:cNvPr>
@@ -15973,18 +15974,24 @@
         </p:nvSpPr>
         <p:spPr>
           <a:xfrm>
-            <a:off x="838200" y="136525"/>
-            <a:ext cx="10515600" cy="728384"/>
-          </a:xfrm>
-        </p:spPr>
-        <p:txBody>
-          <a:bodyPr/>
+            <a:off x="960749" y="136525"/>
+            <a:ext cx="10515600" cy="681250"/>
+          </a:xfrm>
+        </p:spPr>
+        <p:txBody>
+          <a:bodyPr>
+            <a:normAutofit fontScale="90000"/>
+          </a:bodyPr>
           <a:lstStyle/>
           <a:p>
             <a:pPr algn="ctr"/>
             <a:r>
+              <a:rPr lang="en-IN" sz="4900" b="1" u="sng" dirty="0"/>
+              <a:t>Preliminary</a:t>
+            </a:r>
+            <a:r>
               <a:rPr lang="en-IN" b="1" u="sng" dirty="0"/>
-              <a:t>Design Selection</a:t>
+              <a:t> Results</a:t>
             </a:r>
           </a:p>
         </p:txBody>
@@ -15994,7 +16001,7 @@
           <p:cNvPr id="4" name="Slide Number Placeholder 3">
             <a:extLst>
               <a:ext uri="{FF2B5EF4-FFF2-40B4-BE49-F238E27FC236}">
-                <a16:creationId xmlns:a16="http://schemas.microsoft.com/office/drawing/2014/main" id="{7AA37FB3-627E-07D0-7AC3-53AE6E16D2A9}"/>
+                <a16:creationId xmlns:a16="http://schemas.microsoft.com/office/drawing/2014/main" id="{69969BD1-2161-8701-A553-CF7F749386E7}"/>
               </a:ext>
             </a:extLst>
           </p:cNvPr>
@@ -16021,203 +16028,13 @@
       </p:sp>
       <p:sp>
         <p:nvSpPr>
-          <p:cNvPr id="5" name="TextBox 4">
+          <p:cNvPr id="6" name="Rectangle 1">
             <a:extLst>
               <a:ext uri="{FF2B5EF4-FFF2-40B4-BE49-F238E27FC236}">
-                <a16:creationId xmlns:a16="http://schemas.microsoft.com/office/drawing/2014/main" id="{0F6036A6-D902-BF0D-F66F-89871BCAB45B}"/>
+                <a16:creationId xmlns:a16="http://schemas.microsoft.com/office/drawing/2014/main" id="{B35F9F3B-9135-4805-9746-9F0F09120854}"/>
               </a:ext>
             </a:extLst>
           </p:cNvPr>
-          <p:cNvSpPr txBox="1"/>
-          <p:nvPr/>
-        </p:nvSpPr>
-        <p:spPr>
-          <a:xfrm>
-            <a:off x="180680" y="1316641"/>
-            <a:ext cx="11830639" cy="1138773"/>
-          </a:xfrm>
-          <a:prstGeom prst="rect">
-            <a:avLst/>
-          </a:prstGeom>
-          <a:noFill/>
-          <a:ln w="28575">
-            <a:solidFill>
-              <a:srgbClr val="00B050"/>
-            </a:solidFill>
-          </a:ln>
-        </p:spPr>
-        <p:txBody>
-          <a:bodyPr wrap="square" rtlCol="0">
-            <a:spAutoFit/>
-          </a:bodyPr>
-          <a:lstStyle/>
-          <a:p>
-            <a:pPr algn="ctr"/>
-            <a:r>
-              <a:rPr lang="en-US" sz="2200" b="1" dirty="0"/>
-              <a:t>Modular pipeline architecture:</a:t>
-            </a:r>
-          </a:p>
-          <a:p>
-            <a:pPr algn="ctr"/>
-            <a:endParaRPr lang="en-US" sz="2200" dirty="0"/>
-          </a:p>
-          <a:p>
-            <a:pPr algn="ctr"/>
-            <a:r>
-              <a:rPr lang="en-US" sz="2400" dirty="0"/>
-              <a:t>Data Collection → Processing → Analysis → Visualization</a:t>
-            </a:r>
-          </a:p>
-        </p:txBody>
-      </p:sp>
-      <p:sp>
-        <p:nvSpPr>
-          <p:cNvPr id="7" name="TextBox 6">
-            <a:extLst>
-              <a:ext uri="{FF2B5EF4-FFF2-40B4-BE49-F238E27FC236}">
-                <a16:creationId xmlns:a16="http://schemas.microsoft.com/office/drawing/2014/main" id="{FDA58404-3E2C-B09F-15A2-BDFD934F9B18}"/>
-              </a:ext>
-            </a:extLst>
-          </p:cNvPr>
-          <p:cNvSpPr txBox="1"/>
-          <p:nvPr/>
-        </p:nvSpPr>
-        <p:spPr>
-          <a:xfrm>
-            <a:off x="94268" y="3184249"/>
-            <a:ext cx="3928621" cy="1446550"/>
-          </a:xfrm>
-          <a:prstGeom prst="rect">
-            <a:avLst/>
-          </a:prstGeom>
-          <a:noFill/>
-          <a:ln w="28575">
-            <a:solidFill>
-              <a:schemeClr val="tx1"/>
-            </a:solidFill>
-          </a:ln>
-        </p:spPr>
-        <p:txBody>
-          <a:bodyPr wrap="square">
-            <a:spAutoFit/>
-          </a:bodyPr>
-          <a:lstStyle/>
-          <a:p>
-            <a:pPr>
-              <a:buNone/>
-            </a:pPr>
-            <a:r>
-              <a:rPr lang="en-US" sz="2200" b="1" dirty="0"/>
-              <a:t>Design Justification:</a:t>
-            </a:r>
-            <a:endParaRPr lang="en-US" sz="2200" dirty="0"/>
-          </a:p>
-          <a:p>
-            <a:pPr>
-              <a:buFont typeface="Arial" panose="020B0604020202020204" pitchFamily="34" charset="0"/>
-              <a:buChar char="•"/>
-            </a:pPr>
-            <a:r>
-              <a:rPr lang="en-US" sz="2200" dirty="0"/>
-              <a:t>Simple and easy to implement </a:t>
-            </a:r>
-          </a:p>
-          <a:p>
-            <a:pPr>
-              <a:buFont typeface="Arial" panose="020B0604020202020204" pitchFamily="34" charset="0"/>
-              <a:buChar char="•"/>
-            </a:pPr>
-            <a:r>
-              <a:rPr lang="en-US" sz="2200" dirty="0"/>
-              <a:t>Cost-effective </a:t>
-            </a:r>
-          </a:p>
-          <a:p>
-            <a:pPr>
-              <a:buFont typeface="Arial" panose="020B0604020202020204" pitchFamily="34" charset="0"/>
-              <a:buChar char="•"/>
-            </a:pPr>
-            <a:r>
-              <a:rPr lang="en-US" sz="2200" dirty="0"/>
-              <a:t>Scalable for future expansion</a:t>
-            </a:r>
-          </a:p>
-        </p:txBody>
-      </p:sp>
-      <p:sp>
-        <p:nvSpPr>
-          <p:cNvPr id="9" name="TextBox 8">
-            <a:extLst>
-              <a:ext uri="{FF2B5EF4-FFF2-40B4-BE49-F238E27FC236}">
-                <a16:creationId xmlns:a16="http://schemas.microsoft.com/office/drawing/2014/main" id="{F65D6CDB-1993-ED04-116A-9E975B583CCA}"/>
-              </a:ext>
-            </a:extLst>
-          </p:cNvPr>
-          <p:cNvSpPr txBox="1"/>
-          <p:nvPr/>
-        </p:nvSpPr>
-        <p:spPr>
-          <a:xfrm>
-            <a:off x="94268" y="5092362"/>
-            <a:ext cx="4956142" cy="1446550"/>
-          </a:xfrm>
-          <a:prstGeom prst="rect">
-            <a:avLst/>
-          </a:prstGeom>
-          <a:noFill/>
-          <a:ln w="28575">
-            <a:solidFill>
-              <a:schemeClr val="tx1"/>
-            </a:solidFill>
-          </a:ln>
-        </p:spPr>
-        <p:txBody>
-          <a:bodyPr wrap="square">
-            <a:spAutoFit/>
-          </a:bodyPr>
-          <a:lstStyle/>
-          <a:p>
-            <a:pPr>
-              <a:buNone/>
-            </a:pPr>
-            <a:r>
-              <a:rPr lang="en-US" sz="2200" b="1" dirty="0"/>
-              <a:t>Alternative Designs Rejected:</a:t>
-            </a:r>
-            <a:endParaRPr lang="en-US" sz="2200" dirty="0"/>
-          </a:p>
-          <a:p>
-            <a:pPr>
-              <a:buFont typeface="Arial" panose="020B0604020202020204" pitchFamily="34" charset="0"/>
-              <a:buChar char="•"/>
-            </a:pPr>
-            <a:r>
-              <a:rPr lang="en-US" sz="2200" dirty="0"/>
-              <a:t>ML-based systems (require large data) </a:t>
-            </a:r>
-          </a:p>
-          <a:p>
-            <a:pPr>
-              <a:buFont typeface="Arial" panose="020B0604020202020204" pitchFamily="34" charset="0"/>
-              <a:buChar char="•"/>
-            </a:pPr>
-            <a:r>
-              <a:rPr lang="en-US" sz="2200" dirty="0"/>
-              <a:t>Web-based systems (complex development) </a:t>
-            </a:r>
-          </a:p>
-        </p:txBody>
-      </p:sp>
-      <p:sp>
-        <p:nvSpPr>
-          <p:cNvPr id="10" name="Rectangle 1">
-            <a:extLst>
-              <a:ext uri="{FF2B5EF4-FFF2-40B4-BE49-F238E27FC236}">
-                <a16:creationId xmlns:a16="http://schemas.microsoft.com/office/drawing/2014/main" id="{7F532279-8114-6783-72D1-9AF7935525F6}"/>
-              </a:ext>
-            </a:extLst>
-          </p:cNvPr>
           <p:cNvSpPr>
             <a:spLocks noChangeArrowheads="1"/>
           </p:cNvSpPr>
@@ -16225,8 +16042,8 @@
         </p:nvSpPr>
         <p:spPr bwMode="auto">
           <a:xfrm rot="10800000" flipV="1">
-            <a:off x="6407870" y="2713456"/>
-            <a:ext cx="4405460" cy="2585323"/>
+            <a:off x="51851" y="1650400"/>
+            <a:ext cx="3714159" cy="4493538"/>
           </a:xfrm>
           <a:prstGeom prst="rect">
             <a:avLst/>
@@ -16269,7 +16086,7 @@
           </a:bodyPr>
           <a:lstStyle/>
           <a:p>
-            <a:pPr marR="0" lvl="0" algn="l" defTabSz="914400" rtl="0" eaLnBrk="0" fontAlgn="base" latinLnBrk="0" hangingPunct="0">
+            <a:pPr marL="0" marR="0" lvl="0" indent="0" defTabSz="914400" rtl="0" eaLnBrk="0" fontAlgn="base" latinLnBrk="0" hangingPunct="0">
               <a:lnSpc>
                 <a:spcPct val="100000"/>
               </a:lnSpc>
@@ -16283,22 +16100,19 @@
               <a:buSzTx/>
               <a:tabLst/>
             </a:pPr>
-            <a:r>
-              <a:rPr kumimoji="0" lang="en-US" altLang="en-US" sz="1800" b="1" i="0" u="sng" strike="noStrike" cap="none" normalizeH="0" baseline="0" dirty="0">
-                <a:ln>
-                  <a:noFill/>
-                </a:ln>
-                <a:solidFill>
-                  <a:schemeClr val="tx1"/>
-                </a:solidFill>
-                <a:effectLst/>
-                <a:latin typeface="Arial" panose="020B0604020202020204" pitchFamily="34" charset="0"/>
-              </a:rPr>
-              <a:t>OUTCOMES</a:t>
-            </a:r>
-          </a:p>
-          <a:p>
-            <a:pPr marR="0" lvl="0" algn="l" defTabSz="914400" rtl="0" eaLnBrk="0" fontAlgn="base" latinLnBrk="0" hangingPunct="0">
+            <a:endParaRPr kumimoji="0" lang="en-US" altLang="en-US" sz="2200" b="0" i="0" u="none" strike="noStrike" cap="none" normalizeH="0" baseline="0" dirty="0">
+              <a:ln>
+                <a:noFill/>
+              </a:ln>
+              <a:solidFill>
+                <a:schemeClr val="tx1"/>
+              </a:solidFill>
+              <a:effectLst/>
+              <a:latin typeface="Arial" panose="020B0604020202020204" pitchFamily="34" charset="0"/>
+            </a:endParaRPr>
+          </a:p>
+          <a:p>
+            <a:pPr marL="0" marR="0" lvl="0" indent="0" defTabSz="914400" rtl="0" eaLnBrk="0" fontAlgn="base" latinLnBrk="0" hangingPunct="0">
               <a:lnSpc>
                 <a:spcPct val="100000"/>
               </a:lnSpc>
@@ -16312,7 +16126,62 @@
               <a:buSzTx/>
               <a:tabLst/>
             </a:pPr>
-            <a:endParaRPr kumimoji="0" lang="en-US" altLang="en-US" sz="1800" b="0" i="0" u="none" strike="noStrike" cap="none" normalizeH="0" baseline="0" dirty="0">
+            <a:r>
+              <a:rPr kumimoji="0" lang="en-US" altLang="en-US" sz="2200" b="0" i="0" u="none" strike="noStrike" cap="none" normalizeH="0" baseline="0" dirty="0">
+                <a:ln>
+                  <a:noFill/>
+                </a:ln>
+                <a:solidFill>
+                  <a:schemeClr val="tx1"/>
+                </a:solidFill>
+                <a:effectLst/>
+                <a:latin typeface="Arial" panose="020B0604020202020204" pitchFamily="34" charset="0"/>
+              </a:rPr>
+              <a:t>Data collected from </a:t>
+            </a:r>
+            <a:r>
+              <a:rPr kumimoji="0" lang="en-US" altLang="en-US" sz="2200" b="1" i="0" u="none" strike="noStrike" cap="none" normalizeH="0" baseline="0" dirty="0">
+                <a:ln>
+                  <a:noFill/>
+                </a:ln>
+                <a:solidFill>
+                  <a:schemeClr val="tx1"/>
+                </a:solidFill>
+                <a:effectLst/>
+                <a:latin typeface="Arial" panose="020B0604020202020204" pitchFamily="34" charset="0"/>
+              </a:rPr>
+              <a:t>80 students</a:t>
+            </a:r>
+            <a:r>
+              <a:rPr kumimoji="0" lang="en-US" altLang="en-US" sz="2200" b="0" i="0" u="none" strike="noStrike" cap="none" normalizeH="0" baseline="0" dirty="0">
+                <a:ln>
+                  <a:noFill/>
+                </a:ln>
+                <a:solidFill>
+                  <a:schemeClr val="tx1"/>
+                </a:solidFill>
+                <a:effectLst/>
+                <a:latin typeface="Arial" panose="020B0604020202020204" pitchFamily="34" charset="0"/>
+              </a:rPr>
+              <a:t> using Google Forms.</a:t>
+            </a:r>
+          </a:p>
+          <a:p>
+            <a:pPr marL="0" marR="0" lvl="0" indent="0" defTabSz="914400" rtl="0" eaLnBrk="0" fontAlgn="base" latinLnBrk="0" hangingPunct="0">
+              <a:lnSpc>
+                <a:spcPct val="100000"/>
+              </a:lnSpc>
+              <a:spcBef>
+                <a:spcPct val="0"/>
+              </a:spcBef>
+              <a:spcAft>
+                <a:spcPct val="0"/>
+              </a:spcAft>
+              <a:buClrTx/>
+              <a:buSzTx/>
+              <a:tabLst/>
+            </a:pPr>
+            <a:endParaRPr kumimoji="0" lang="en-US" altLang="en-US" sz="2200" b="0" i="0" u="none" strike="noStrike" cap="none" normalizeH="0" baseline="0" dirty="0">
               <a:ln>
                 <a:noFill/>
               </a:ln>
@@ -16324,7 +16193,62 @@
             </a:endParaRPr>
           </a:p>
           <a:p>
-            <a:pPr marL="285750" marR="0" lvl="0" indent="-285750" algn="l" defTabSz="914400" rtl="0" eaLnBrk="0" fontAlgn="base" latinLnBrk="0" hangingPunct="0">
+            <a:pPr marL="0" marR="0" lvl="0" indent="0" defTabSz="914400" rtl="0" eaLnBrk="0" fontAlgn="base" latinLnBrk="0" hangingPunct="0">
+              <a:lnSpc>
+                <a:spcPct val="100000"/>
+              </a:lnSpc>
+              <a:spcBef>
+                <a:spcPct val="0"/>
+              </a:spcBef>
+              <a:spcAft>
+                <a:spcPct val="0"/>
+              </a:spcAft>
+              <a:buClrTx/>
+              <a:buSzTx/>
+              <a:tabLst/>
+            </a:pPr>
+            <a:endParaRPr kumimoji="0" lang="en-US" altLang="en-US" sz="2200" b="0" i="0" u="none" strike="noStrike" cap="none" normalizeH="0" baseline="0" dirty="0">
+              <a:ln>
+                <a:noFill/>
+              </a:ln>
+              <a:solidFill>
+                <a:schemeClr val="tx1"/>
+              </a:solidFill>
+              <a:effectLst/>
+              <a:latin typeface="Arial" panose="020B0604020202020204" pitchFamily="34" charset="0"/>
+            </a:endParaRPr>
+          </a:p>
+          <a:p>
+            <a:pPr marL="0" marR="0" lvl="0" indent="0" defTabSz="914400" rtl="0" eaLnBrk="0" fontAlgn="base" latinLnBrk="0" hangingPunct="0">
+              <a:lnSpc>
+                <a:spcPct val="100000"/>
+              </a:lnSpc>
+              <a:spcBef>
+                <a:spcPct val="0"/>
+              </a:spcBef>
+              <a:spcAft>
+                <a:spcPct val="0"/>
+              </a:spcAft>
+              <a:buClrTx/>
+              <a:buSzTx/>
+              <a:tabLst/>
+            </a:pPr>
+            <a:r>
+              <a:rPr kumimoji="0" lang="en-US" altLang="en-US" sz="2200" b="0" i="0" u="none" strike="noStrike" cap="none" normalizeH="0" baseline="0" dirty="0">
+                <a:ln>
+                  <a:noFill/>
+                </a:ln>
+                <a:solidFill>
+                  <a:schemeClr val="tx1"/>
+                </a:solidFill>
+                <a:effectLst/>
+                <a:latin typeface="Arial" panose="020B0604020202020204" pitchFamily="34" charset="0"/>
+              </a:rPr>
+              <a:t>Behavioral indices successfully computed: </a:t>
+            </a:r>
+          </a:p>
+          <a:p>
+            <a:pPr marL="342900" marR="0" lvl="0" indent="-342900" defTabSz="914400" rtl="0" eaLnBrk="0" fontAlgn="base" latinLnBrk="0" hangingPunct="0">
               <a:lnSpc>
                 <a:spcPct val="100000"/>
               </a:lnSpc>
@@ -16341,7 +16265,7 @@
               <a:tabLst/>
             </a:pPr>
             <a:r>
-              <a:rPr kumimoji="0" lang="en-US" altLang="en-US" sz="1800" b="0" i="0" u="none" strike="noStrike" cap="none" normalizeH="0" baseline="0" dirty="0">
+              <a:rPr kumimoji="0" lang="en-US" altLang="en-US" sz="2200" b="0" i="0" u="none" strike="noStrike" cap="none" normalizeH="0" baseline="0" dirty="0">
                 <a:ln>
                   <a:noFill/>
                 </a:ln>
@@ -16351,11 +16275,11 @@
                 <a:effectLst/>
                 <a:latin typeface="Arial" panose="020B0604020202020204" pitchFamily="34" charset="0"/>
               </a:rPr>
-              <a:t>System is technically and economically feasible </a:t>
-            </a:r>
-          </a:p>
-          <a:p>
-            <a:pPr marL="285750" marR="0" lvl="0" indent="-285750" algn="l" defTabSz="914400" rtl="0" eaLnBrk="0" fontAlgn="base" latinLnBrk="0" hangingPunct="0">
+              <a:t>Learning Fragmentation Index (LFI) </a:t>
+            </a:r>
+          </a:p>
+          <a:p>
+            <a:pPr marL="342900" marR="0" lvl="0" indent="-342900" defTabSz="914400" rtl="0" eaLnBrk="0" fontAlgn="base" latinLnBrk="0" hangingPunct="0">
               <a:lnSpc>
                 <a:spcPct val="100000"/>
               </a:lnSpc>
@@ -16372,7 +16296,7 @@
               <a:tabLst/>
             </a:pPr>
             <a:r>
-              <a:rPr kumimoji="0" lang="en-US" altLang="en-US" sz="1800" b="0" i="0" u="none" strike="noStrike" cap="none" normalizeH="0" baseline="0" dirty="0">
+              <a:rPr kumimoji="0" lang="en-US" altLang="en-US" sz="2200" b="0" i="0" u="none" strike="noStrike" cap="none" normalizeH="0" baseline="0" dirty="0">
                 <a:ln>
                   <a:noFill/>
                 </a:ln>
@@ -16382,11 +16306,11 @@
                 <a:effectLst/>
                 <a:latin typeface="Arial" panose="020B0604020202020204" pitchFamily="34" charset="0"/>
               </a:rPr>
-              <a:t>Design is scalable and efficient </a:t>
-            </a:r>
-          </a:p>
-          <a:p>
-            <a:pPr marL="285750" marR="0" lvl="0" indent="-285750" algn="l" defTabSz="914400" rtl="0" eaLnBrk="0" fontAlgn="base" latinLnBrk="0" hangingPunct="0">
+              <a:t>Replay Dependency Phenomenon (RDP)</a:t>
+            </a:r>
+          </a:p>
+          <a:p>
+            <a:pPr marL="0" marR="0" lvl="0" indent="0" defTabSz="914400" rtl="0" eaLnBrk="0" fontAlgn="base" latinLnBrk="0" hangingPunct="0">
               <a:lnSpc>
                 <a:spcPct val="100000"/>
               </a:lnSpc>
@@ -16398,53 +16322,249 @@
               </a:spcAft>
               <a:buClrTx/>
               <a:buSzTx/>
+              <a:buFontTx/>
+              <a:buNone/>
+              <a:tabLst/>
+            </a:pPr>
+            <a:endParaRPr kumimoji="0" lang="en-US" altLang="en-US" sz="2200" b="0" i="0" u="none" strike="noStrike" cap="none" normalizeH="0" baseline="0" dirty="0">
+              <a:ln>
+                <a:noFill/>
+              </a:ln>
+              <a:solidFill>
+                <a:schemeClr val="tx1"/>
+              </a:solidFill>
+              <a:effectLst/>
+              <a:latin typeface="Arial" panose="020B0604020202020204" pitchFamily="34" charset="0"/>
+            </a:endParaRPr>
+          </a:p>
+        </p:txBody>
+      </p:sp>
+      <p:sp>
+        <p:nvSpPr>
+          <p:cNvPr id="8" name="TextBox 7">
+            <a:extLst>
+              <a:ext uri="{FF2B5EF4-FFF2-40B4-BE49-F238E27FC236}">
+                <a16:creationId xmlns:a16="http://schemas.microsoft.com/office/drawing/2014/main" id="{F2E3B2BE-F33D-D548-4170-C4D0AA937C03}"/>
+              </a:ext>
+            </a:extLst>
+          </p:cNvPr>
+          <p:cNvSpPr txBox="1"/>
+          <p:nvPr/>
+        </p:nvSpPr>
+        <p:spPr>
+          <a:xfrm>
+            <a:off x="3974185" y="1650400"/>
+            <a:ext cx="3714161" cy="1446550"/>
+          </a:xfrm>
+          <a:prstGeom prst="rect">
+            <a:avLst/>
+          </a:prstGeom>
+          <a:noFill/>
+          <a:ln w="28575">
+            <a:solidFill>
+              <a:schemeClr val="tx1"/>
+            </a:solidFill>
+          </a:ln>
+        </p:spPr>
+        <p:txBody>
+          <a:bodyPr wrap="square">
+            <a:spAutoFit/>
+          </a:bodyPr>
+          <a:lstStyle/>
+          <a:p>
+            <a:pPr>
+              <a:buNone/>
+            </a:pPr>
+            <a:r>
+              <a:rPr lang="en-US" sz="2200" b="1" dirty="0"/>
+              <a:t>Average Values:</a:t>
+            </a:r>
+            <a:endParaRPr lang="en-US" sz="2200" dirty="0"/>
+          </a:p>
+          <a:p>
+            <a:pPr>
               <a:buFont typeface="Arial" panose="020B0604020202020204" pitchFamily="34" charset="0"/>
               <a:buChar char="•"/>
-              <a:tabLst/>
             </a:pPr>
             <a:r>
-              <a:rPr kumimoji="0" lang="en-US" altLang="en-US" sz="1800" b="0" i="0" u="none" strike="noStrike" cap="none" normalizeH="0" baseline="0" dirty="0">
-                <a:ln>
-                  <a:noFill/>
-                </a:ln>
-                <a:solidFill>
-                  <a:schemeClr val="tx1"/>
-                </a:solidFill>
-                <a:effectLst/>
-                <a:latin typeface="Arial" panose="020B0604020202020204" pitchFamily="34" charset="0"/>
-              </a:rPr>
-              <a:t>Provides structured approach for implementation </a:t>
-            </a:r>
-          </a:p>
-          <a:p>
-            <a:pPr marL="285750" marR="0" lvl="0" indent="-285750" algn="l" defTabSz="914400" rtl="0" eaLnBrk="0" fontAlgn="base" latinLnBrk="0" hangingPunct="0">
-              <a:lnSpc>
-                <a:spcPct val="100000"/>
-              </a:lnSpc>
-              <a:spcBef>
-                <a:spcPct val="0"/>
-              </a:spcBef>
-              <a:spcAft>
-                <a:spcPct val="0"/>
-              </a:spcAft>
-              <a:buClrTx/>
-              <a:buSzTx/>
+              <a:rPr lang="en-US" sz="2200" dirty="0"/>
+              <a:t>LFI = 0.51 </a:t>
+            </a:r>
+          </a:p>
+          <a:p>
+            <a:pPr>
               <a:buFont typeface="Arial" panose="020B0604020202020204" pitchFamily="34" charset="0"/>
               <a:buChar char="•"/>
-              <a:tabLst/>
             </a:pPr>
             <a:r>
-              <a:rPr kumimoji="0" lang="en-US" altLang="en-US" sz="1800" b="0" i="0" u="none" strike="noStrike" cap="none" normalizeH="0" baseline="0" dirty="0">
-                <a:ln>
-                  <a:noFill/>
-                </a:ln>
+              <a:rPr lang="en-US" sz="2200" dirty="0"/>
+              <a:t>RDP = 0.47 </a:t>
+            </a:r>
+          </a:p>
+          <a:p>
+            <a:pPr>
+              <a:buFont typeface="Arial" panose="020B0604020202020204" pitchFamily="34" charset="0"/>
+              <a:buChar char="•"/>
+            </a:pPr>
+            <a:r>
+              <a:rPr lang="en-US" sz="2200" dirty="0"/>
+              <a:t>Learning Effectiveness = 6.29</a:t>
+            </a:r>
+          </a:p>
+        </p:txBody>
+      </p:sp>
+      <p:sp>
+        <p:nvSpPr>
+          <p:cNvPr id="10" name="TextBox 9">
+            <a:extLst>
+              <a:ext uri="{FF2B5EF4-FFF2-40B4-BE49-F238E27FC236}">
+                <a16:creationId xmlns:a16="http://schemas.microsoft.com/office/drawing/2014/main" id="{F954FEE8-EF1D-9431-B3AD-9D96B7873F39}"/>
+              </a:ext>
+            </a:extLst>
+          </p:cNvPr>
+          <p:cNvSpPr txBox="1"/>
+          <p:nvPr/>
+        </p:nvSpPr>
+        <p:spPr>
+          <a:xfrm>
+            <a:off x="7896520" y="1650400"/>
+            <a:ext cx="3019719" cy="1446550"/>
+          </a:xfrm>
+          <a:prstGeom prst="rect">
+            <a:avLst/>
+          </a:prstGeom>
+          <a:noFill/>
+          <a:ln w="28575">
+            <a:solidFill>
+              <a:schemeClr val="tx1"/>
+            </a:solidFill>
+          </a:ln>
+        </p:spPr>
+        <p:txBody>
+          <a:bodyPr wrap="square">
+            <a:spAutoFit/>
+          </a:bodyPr>
+          <a:lstStyle/>
+          <a:p>
+            <a:pPr>
+              <a:buNone/>
+            </a:pPr>
+            <a:r>
+              <a:rPr lang="en-US" sz="2200" b="1" dirty="0"/>
+              <a:t>Risk Classification:</a:t>
+            </a:r>
+            <a:endParaRPr lang="en-US" sz="2200" dirty="0"/>
+          </a:p>
+          <a:p>
+            <a:pPr>
+              <a:buFont typeface="Arial" panose="020B0604020202020204" pitchFamily="34" charset="0"/>
+              <a:buChar char="•"/>
+            </a:pPr>
+            <a:r>
+              <a:rPr lang="en-US" sz="2200" dirty="0">
                 <a:solidFill>
-                  <a:schemeClr val="tx1"/>
+                  <a:srgbClr val="00B050"/>
                 </a:solidFill>
-                <a:effectLst/>
-                <a:latin typeface="Arial" panose="020B0604020202020204" pitchFamily="34" charset="0"/>
               </a:rPr>
-              <a:t>Ready for deployment in academic environments </a:t>
+              <a:t>65% Low Risk </a:t>
+            </a:r>
+          </a:p>
+          <a:p>
+            <a:pPr>
+              <a:buFont typeface="Arial" panose="020B0604020202020204" pitchFamily="34" charset="0"/>
+              <a:buChar char="•"/>
+            </a:pPr>
+            <a:r>
+              <a:rPr lang="en-US" sz="2200" dirty="0"/>
+              <a:t>30% Moderate Risk </a:t>
+            </a:r>
+          </a:p>
+          <a:p>
+            <a:pPr>
+              <a:buFont typeface="Arial" panose="020B0604020202020204" pitchFamily="34" charset="0"/>
+              <a:buChar char="•"/>
+            </a:pPr>
+            <a:r>
+              <a:rPr lang="en-US" sz="2200" dirty="0">
+                <a:solidFill>
+                  <a:srgbClr val="FF0000"/>
+                </a:solidFill>
+              </a:rPr>
+              <a:t>5% High Risk</a:t>
+            </a:r>
+          </a:p>
+        </p:txBody>
+      </p:sp>
+      <p:sp>
+        <p:nvSpPr>
+          <p:cNvPr id="12" name="TextBox 11">
+            <a:extLst>
+              <a:ext uri="{FF2B5EF4-FFF2-40B4-BE49-F238E27FC236}">
+                <a16:creationId xmlns:a16="http://schemas.microsoft.com/office/drawing/2014/main" id="{996FD99B-CD0A-05D1-0B0B-A67D3CEACC73}"/>
+              </a:ext>
+            </a:extLst>
+          </p:cNvPr>
+          <p:cNvSpPr txBox="1"/>
+          <p:nvPr/>
+        </p:nvSpPr>
+        <p:spPr>
+          <a:xfrm>
+            <a:off x="3974185" y="4315048"/>
+            <a:ext cx="6942054" cy="1785104"/>
+          </a:xfrm>
+          <a:prstGeom prst="rect">
+            <a:avLst/>
+          </a:prstGeom>
+          <a:noFill/>
+          <a:ln w="28575">
+            <a:solidFill>
+              <a:schemeClr val="tx1"/>
+            </a:solidFill>
+          </a:ln>
+        </p:spPr>
+        <p:txBody>
+          <a:bodyPr wrap="square">
+            <a:spAutoFit/>
+          </a:bodyPr>
+          <a:lstStyle/>
+          <a:p>
+            <a:pPr>
+              <a:buNone/>
+            </a:pPr>
+            <a:r>
+              <a:rPr lang="en-US" sz="2200" b="1" dirty="0"/>
+              <a:t>Key Observations:</a:t>
+            </a:r>
+            <a:endParaRPr lang="en-US" sz="2200" dirty="0"/>
+          </a:p>
+          <a:p>
+            <a:pPr>
+              <a:buFont typeface="Arial" panose="020B0604020202020204" pitchFamily="34" charset="0"/>
+              <a:buChar char="•"/>
+            </a:pPr>
+            <a:r>
+              <a:rPr lang="en-US" sz="2200" dirty="0"/>
+              <a:t>Higher fragmentation leads to lower learning effectiveness </a:t>
+            </a:r>
+          </a:p>
+          <a:p>
+            <a:pPr>
+              <a:buFont typeface="Arial" panose="020B0604020202020204" pitchFamily="34" charset="0"/>
+              <a:buChar char="•"/>
+            </a:pPr>
+            <a:r>
+              <a:rPr lang="en-US" sz="2200" dirty="0"/>
+              <a:t>Students with high replay dependency show learning difficulty </a:t>
+            </a:r>
+          </a:p>
+          <a:p>
+            <a:pPr>
+              <a:buFont typeface="Arial" panose="020B0604020202020204" pitchFamily="34" charset="0"/>
+              <a:buChar char="•"/>
+            </a:pPr>
+            <a:r>
+              <a:rPr lang="en-US" sz="2200" dirty="0"/>
+              <a:t>LFI and RDP show a positive correlation</a:t>
             </a:r>
           </a:p>
         </p:txBody>
@@ -16452,7 +16572,7 @@
     </p:spTree>
     <p:extLst>
       <p:ext uri="{BB962C8B-B14F-4D97-AF65-F5344CB8AC3E}">
-        <p14:creationId xmlns:p14="http://schemas.microsoft.com/office/powerpoint/2010/main" val="3337757203"/>
+        <p14:creationId xmlns:p14="http://schemas.microsoft.com/office/powerpoint/2010/main" val="2701604256"/>
       </p:ext>
     </p:extLst>
   </p:cSld>
@@ -16484,6 +16604,519 @@
           <p:cNvPr id="2" name="Title 1">
             <a:extLst>
               <a:ext uri="{FF2B5EF4-FFF2-40B4-BE49-F238E27FC236}">
+                <a16:creationId xmlns:a16="http://schemas.microsoft.com/office/drawing/2014/main" id="{28F040A7-B947-66EC-920B-89AACD3F3298}"/>
+              </a:ext>
+            </a:extLst>
+          </p:cNvPr>
+          <p:cNvSpPr>
+            <a:spLocks noGrp="1"/>
+          </p:cNvSpPr>
+          <p:nvPr>
+            <p:ph type="title"/>
+          </p:nvPr>
+        </p:nvSpPr>
+        <p:spPr>
+          <a:xfrm>
+            <a:off x="838200" y="136525"/>
+            <a:ext cx="10515600" cy="728384"/>
+          </a:xfrm>
+        </p:spPr>
+        <p:txBody>
+          <a:bodyPr/>
+          <a:lstStyle/>
+          <a:p>
+            <a:pPr algn="ctr"/>
+            <a:r>
+              <a:rPr lang="en-IN" b="1" u="sng" dirty="0"/>
+              <a:t>Design Selection/ Prototype</a:t>
+            </a:r>
+          </a:p>
+        </p:txBody>
+      </p:sp>
+      <p:sp>
+        <p:nvSpPr>
+          <p:cNvPr id="4" name="Slide Number Placeholder 3">
+            <a:extLst>
+              <a:ext uri="{FF2B5EF4-FFF2-40B4-BE49-F238E27FC236}">
+                <a16:creationId xmlns:a16="http://schemas.microsoft.com/office/drawing/2014/main" id="{7AA37FB3-627E-07D0-7AC3-53AE6E16D2A9}"/>
+              </a:ext>
+            </a:extLst>
+          </p:cNvPr>
+          <p:cNvSpPr>
+            <a:spLocks noGrp="1"/>
+          </p:cNvSpPr>
+          <p:nvPr>
+            <p:ph type="sldNum" sz="quarter" idx="12"/>
+          </p:nvPr>
+        </p:nvSpPr>
+        <p:spPr/>
+        <p:txBody>
+          <a:bodyPr/>
+          <a:lstStyle/>
+          <a:p>
+            <a:fld id="{BDCDBBEF-AA6C-4BA6-85B2-A17D7F280E38}" type="slidenum">
+              <a:rPr lang="en-US" smtClean="0"/>
+              <a:pPr/>
+              <a:t>8</a:t>
+            </a:fld>
+            <a:endParaRPr lang="en-US"/>
+          </a:p>
+        </p:txBody>
+      </p:sp>
+      <p:sp>
+        <p:nvSpPr>
+          <p:cNvPr id="7" name="TextBox 6">
+            <a:extLst>
+              <a:ext uri="{FF2B5EF4-FFF2-40B4-BE49-F238E27FC236}">
+                <a16:creationId xmlns:a16="http://schemas.microsoft.com/office/drawing/2014/main" id="{FDA58404-3E2C-B09F-15A2-BDFD934F9B18}"/>
+              </a:ext>
+            </a:extLst>
+          </p:cNvPr>
+          <p:cNvSpPr txBox="1"/>
+          <p:nvPr/>
+        </p:nvSpPr>
+        <p:spPr>
+          <a:xfrm>
+            <a:off x="8263380" y="3852229"/>
+            <a:ext cx="3784862" cy="1446550"/>
+          </a:xfrm>
+          <a:prstGeom prst="rect">
+            <a:avLst/>
+          </a:prstGeom>
+          <a:noFill/>
+          <a:ln w="28575">
+            <a:solidFill>
+              <a:schemeClr val="tx1"/>
+            </a:solidFill>
+          </a:ln>
+        </p:spPr>
+        <p:txBody>
+          <a:bodyPr wrap="square">
+            <a:spAutoFit/>
+          </a:bodyPr>
+          <a:lstStyle/>
+          <a:p>
+            <a:pPr>
+              <a:buNone/>
+            </a:pPr>
+            <a:r>
+              <a:rPr lang="en-US" sz="2200" b="1" dirty="0"/>
+              <a:t>Design Justification:</a:t>
+            </a:r>
+            <a:endParaRPr lang="en-US" sz="2200" dirty="0"/>
+          </a:p>
+          <a:p>
+            <a:pPr>
+              <a:buFont typeface="Arial" panose="020B0604020202020204" pitchFamily="34" charset="0"/>
+              <a:buChar char="•"/>
+            </a:pPr>
+            <a:r>
+              <a:rPr lang="en-US" sz="2200" dirty="0"/>
+              <a:t>Simple and easy to implement </a:t>
+            </a:r>
+          </a:p>
+          <a:p>
+            <a:pPr>
+              <a:buFont typeface="Arial" panose="020B0604020202020204" pitchFamily="34" charset="0"/>
+              <a:buChar char="•"/>
+            </a:pPr>
+            <a:r>
+              <a:rPr lang="en-US" sz="2200" dirty="0"/>
+              <a:t>Cost-effective </a:t>
+            </a:r>
+          </a:p>
+          <a:p>
+            <a:pPr>
+              <a:buFont typeface="Arial" panose="020B0604020202020204" pitchFamily="34" charset="0"/>
+              <a:buChar char="•"/>
+            </a:pPr>
+            <a:r>
+              <a:rPr lang="en-US" sz="2200" dirty="0"/>
+              <a:t>Scalable for future expansion</a:t>
+            </a:r>
+          </a:p>
+        </p:txBody>
+      </p:sp>
+      <p:sp>
+        <p:nvSpPr>
+          <p:cNvPr id="9" name="TextBox 8">
+            <a:extLst>
+              <a:ext uri="{FF2B5EF4-FFF2-40B4-BE49-F238E27FC236}">
+                <a16:creationId xmlns:a16="http://schemas.microsoft.com/office/drawing/2014/main" id="{F65D6CDB-1993-ED04-116A-9E975B583CCA}"/>
+              </a:ext>
+            </a:extLst>
+          </p:cNvPr>
+          <p:cNvSpPr txBox="1"/>
+          <p:nvPr/>
+        </p:nvSpPr>
+        <p:spPr>
+          <a:xfrm>
+            <a:off x="838200" y="5613479"/>
+            <a:ext cx="5410986" cy="1107996"/>
+          </a:xfrm>
+          <a:prstGeom prst="rect">
+            <a:avLst/>
+          </a:prstGeom>
+          <a:noFill/>
+          <a:ln w="28575">
+            <a:solidFill>
+              <a:schemeClr val="tx1"/>
+            </a:solidFill>
+          </a:ln>
+        </p:spPr>
+        <p:txBody>
+          <a:bodyPr wrap="square">
+            <a:spAutoFit/>
+          </a:bodyPr>
+          <a:lstStyle/>
+          <a:p>
+            <a:pPr>
+              <a:buNone/>
+            </a:pPr>
+            <a:r>
+              <a:rPr lang="en-US" sz="2200" b="1" dirty="0"/>
+              <a:t>Alternative Designs Rejected:</a:t>
+            </a:r>
+            <a:endParaRPr lang="en-US" sz="2200" dirty="0"/>
+          </a:p>
+          <a:p>
+            <a:pPr>
+              <a:buFont typeface="Arial" panose="020B0604020202020204" pitchFamily="34" charset="0"/>
+              <a:buChar char="•"/>
+            </a:pPr>
+            <a:r>
+              <a:rPr lang="en-US" sz="2200" dirty="0"/>
+              <a:t>ML-based systems (require large data) </a:t>
+            </a:r>
+          </a:p>
+          <a:p>
+            <a:pPr>
+              <a:buFont typeface="Arial" panose="020B0604020202020204" pitchFamily="34" charset="0"/>
+              <a:buChar char="•"/>
+            </a:pPr>
+            <a:r>
+              <a:rPr lang="en-US" sz="2200" dirty="0"/>
+              <a:t>Web-based systems (complex development) </a:t>
+            </a:r>
+          </a:p>
+        </p:txBody>
+      </p:sp>
+      <p:sp>
+        <p:nvSpPr>
+          <p:cNvPr id="10" name="Rectangle 1">
+            <a:extLst>
+              <a:ext uri="{FF2B5EF4-FFF2-40B4-BE49-F238E27FC236}">
+                <a16:creationId xmlns:a16="http://schemas.microsoft.com/office/drawing/2014/main" id="{7F532279-8114-6783-72D1-9AF7935525F6}"/>
+              </a:ext>
+            </a:extLst>
+          </p:cNvPr>
+          <p:cNvSpPr>
+            <a:spLocks noChangeArrowheads="1"/>
+          </p:cNvSpPr>
+          <p:nvPr/>
+        </p:nvSpPr>
+        <p:spPr bwMode="auto">
+          <a:xfrm rot="10800000" flipV="1">
+            <a:off x="8220173" y="984359"/>
+            <a:ext cx="3828068" cy="2585323"/>
+          </a:xfrm>
+          <a:prstGeom prst="rect">
+            <a:avLst/>
+          </a:prstGeom>
+          <a:noFill/>
+          <a:ln w="28575">
+            <a:solidFill>
+              <a:schemeClr val="tx1"/>
+            </a:solidFill>
+            <a:miter lim="800000"/>
+            <a:headEnd/>
+            <a:tailEnd/>
+          </a:ln>
+          <a:effectLst/>
+          <a:extLst>
+            <a:ext uri="{909E8E84-426E-40DD-AFC4-6F175D3DCCD1}">
+              <a14:hiddenFill xmlns:a14="http://schemas.microsoft.com/office/drawing/2010/main">
+                <a:solidFill>
+                  <a:schemeClr val="accent1"/>
+                </a:solidFill>
+              </a14:hiddenFill>
+            </a:ext>
+            <a:ext uri="{AF507438-7753-43E0-B8FC-AC1667EBCBE1}">
+              <a14:hiddenEffects xmlns:a14="http://schemas.microsoft.com/office/drawing/2010/main">
+                <a:effectLst>
+                  <a:outerShdw dist="35921" dir="2700000" algn="ctr" rotWithShape="0">
+                    <a:schemeClr val="bg2"/>
+                  </a:outerShdw>
+                </a:effectLst>
+              </a14:hiddenEffects>
+            </a:ext>
+          </a:extLst>
+        </p:spPr>
+        <p:txBody>
+          <a:bodyPr vert="horz" wrap="square" lIns="91440" tIns="45720" rIns="91440" bIns="45720" numCol="1" anchor="ctr" anchorCtr="0" compatLnSpc="1">
+            <a:prstTxWarp prst="textNoShape">
+              <a:avLst/>
+            </a:prstTxWarp>
+            <a:spAutoFit/>
+          </a:bodyPr>
+          <a:lstStyle/>
+          <a:p>
+            <a:pPr marR="0" lvl="0" algn="l" defTabSz="914400" rtl="0" eaLnBrk="0" fontAlgn="base" latinLnBrk="0" hangingPunct="0">
+              <a:lnSpc>
+                <a:spcPct val="100000"/>
+              </a:lnSpc>
+              <a:spcBef>
+                <a:spcPct val="0"/>
+              </a:spcBef>
+              <a:spcAft>
+                <a:spcPct val="0"/>
+              </a:spcAft>
+              <a:buClrTx/>
+              <a:buSzTx/>
+              <a:tabLst/>
+            </a:pPr>
+            <a:r>
+              <a:rPr kumimoji="0" lang="en-US" altLang="en-US" sz="1800" b="1" i="0" u="sng" strike="noStrike" cap="none" normalizeH="0" baseline="0" dirty="0">
+                <a:ln>
+                  <a:noFill/>
+                </a:ln>
+                <a:solidFill>
+                  <a:schemeClr val="tx1"/>
+                </a:solidFill>
+                <a:effectLst/>
+                <a:latin typeface="Arial" panose="020B0604020202020204" pitchFamily="34" charset="0"/>
+              </a:rPr>
+              <a:t>OUTCOMES</a:t>
+            </a:r>
+          </a:p>
+          <a:p>
+            <a:pPr marR="0" lvl="0" algn="l" defTabSz="914400" rtl="0" eaLnBrk="0" fontAlgn="base" latinLnBrk="0" hangingPunct="0">
+              <a:lnSpc>
+                <a:spcPct val="100000"/>
+              </a:lnSpc>
+              <a:spcBef>
+                <a:spcPct val="0"/>
+              </a:spcBef>
+              <a:spcAft>
+                <a:spcPct val="0"/>
+              </a:spcAft>
+              <a:buClrTx/>
+              <a:buSzTx/>
+              <a:tabLst/>
+            </a:pPr>
+            <a:endParaRPr kumimoji="0" lang="en-US" altLang="en-US" sz="1800" b="0" i="0" u="none" strike="noStrike" cap="none" normalizeH="0" baseline="0" dirty="0">
+              <a:ln>
+                <a:noFill/>
+              </a:ln>
+              <a:solidFill>
+                <a:schemeClr val="tx1"/>
+              </a:solidFill>
+              <a:effectLst/>
+              <a:latin typeface="Arial" panose="020B0604020202020204" pitchFamily="34" charset="0"/>
+            </a:endParaRPr>
+          </a:p>
+          <a:p>
+            <a:pPr marL="285750" marR="0" lvl="0" indent="-285750" algn="l" defTabSz="914400" rtl="0" eaLnBrk="0" fontAlgn="base" latinLnBrk="0" hangingPunct="0">
+              <a:lnSpc>
+                <a:spcPct val="100000"/>
+              </a:lnSpc>
+              <a:spcBef>
+                <a:spcPct val="0"/>
+              </a:spcBef>
+              <a:spcAft>
+                <a:spcPct val="0"/>
+              </a:spcAft>
+              <a:buClrTx/>
+              <a:buSzTx/>
+              <a:buFont typeface="Arial" panose="020B0604020202020204" pitchFamily="34" charset="0"/>
+              <a:buChar char="•"/>
+              <a:tabLst/>
+            </a:pPr>
+            <a:r>
+              <a:rPr kumimoji="0" lang="en-US" altLang="en-US" sz="1800" b="0" i="0" u="none" strike="noStrike" cap="none" normalizeH="0" baseline="0" dirty="0">
+                <a:ln>
+                  <a:noFill/>
+                </a:ln>
+                <a:solidFill>
+                  <a:schemeClr val="tx1"/>
+                </a:solidFill>
+                <a:effectLst/>
+                <a:latin typeface="Arial" panose="020B0604020202020204" pitchFamily="34" charset="0"/>
+              </a:rPr>
+              <a:t>System is technically and economically feasible </a:t>
+            </a:r>
+          </a:p>
+          <a:p>
+            <a:pPr marL="285750" marR="0" lvl="0" indent="-285750" algn="l" defTabSz="914400" rtl="0" eaLnBrk="0" fontAlgn="base" latinLnBrk="0" hangingPunct="0">
+              <a:lnSpc>
+                <a:spcPct val="100000"/>
+              </a:lnSpc>
+              <a:spcBef>
+                <a:spcPct val="0"/>
+              </a:spcBef>
+              <a:spcAft>
+                <a:spcPct val="0"/>
+              </a:spcAft>
+              <a:buClrTx/>
+              <a:buSzTx/>
+              <a:buFont typeface="Arial" panose="020B0604020202020204" pitchFamily="34" charset="0"/>
+              <a:buChar char="•"/>
+              <a:tabLst/>
+            </a:pPr>
+            <a:r>
+              <a:rPr kumimoji="0" lang="en-US" altLang="en-US" sz="1800" b="0" i="0" u="none" strike="noStrike" cap="none" normalizeH="0" baseline="0" dirty="0">
+                <a:ln>
+                  <a:noFill/>
+                </a:ln>
+                <a:solidFill>
+                  <a:schemeClr val="tx1"/>
+                </a:solidFill>
+                <a:effectLst/>
+                <a:latin typeface="Arial" panose="020B0604020202020204" pitchFamily="34" charset="0"/>
+              </a:rPr>
+              <a:t>Design is scalable and efficient </a:t>
+            </a:r>
+          </a:p>
+          <a:p>
+            <a:pPr marL="285750" marR="0" lvl="0" indent="-285750" algn="l" defTabSz="914400" rtl="0" eaLnBrk="0" fontAlgn="base" latinLnBrk="0" hangingPunct="0">
+              <a:lnSpc>
+                <a:spcPct val="100000"/>
+              </a:lnSpc>
+              <a:spcBef>
+                <a:spcPct val="0"/>
+              </a:spcBef>
+              <a:spcAft>
+                <a:spcPct val="0"/>
+              </a:spcAft>
+              <a:buClrTx/>
+              <a:buSzTx/>
+              <a:buFont typeface="Arial" panose="020B0604020202020204" pitchFamily="34" charset="0"/>
+              <a:buChar char="•"/>
+              <a:tabLst/>
+            </a:pPr>
+            <a:r>
+              <a:rPr kumimoji="0" lang="en-US" altLang="en-US" sz="1800" b="0" i="0" u="none" strike="noStrike" cap="none" normalizeH="0" baseline="0" dirty="0">
+                <a:ln>
+                  <a:noFill/>
+                </a:ln>
+                <a:solidFill>
+                  <a:schemeClr val="tx1"/>
+                </a:solidFill>
+                <a:effectLst/>
+                <a:latin typeface="Arial" panose="020B0604020202020204" pitchFamily="34" charset="0"/>
+              </a:rPr>
+              <a:t>Provides structured approach for implementation </a:t>
+            </a:r>
+          </a:p>
+          <a:p>
+            <a:pPr marL="285750" marR="0" lvl="0" indent="-285750" algn="l" defTabSz="914400" rtl="0" eaLnBrk="0" fontAlgn="base" latinLnBrk="0" hangingPunct="0">
+              <a:lnSpc>
+                <a:spcPct val="100000"/>
+              </a:lnSpc>
+              <a:spcBef>
+                <a:spcPct val="0"/>
+              </a:spcBef>
+              <a:spcAft>
+                <a:spcPct val="0"/>
+              </a:spcAft>
+              <a:buClrTx/>
+              <a:buSzTx/>
+              <a:buFont typeface="Arial" panose="020B0604020202020204" pitchFamily="34" charset="0"/>
+              <a:buChar char="•"/>
+              <a:tabLst/>
+            </a:pPr>
+            <a:r>
+              <a:rPr kumimoji="0" lang="en-US" altLang="en-US" sz="1800" b="0" i="0" u="none" strike="noStrike" cap="none" normalizeH="0" baseline="0" dirty="0">
+                <a:ln>
+                  <a:noFill/>
+                </a:ln>
+                <a:solidFill>
+                  <a:schemeClr val="tx1"/>
+                </a:solidFill>
+                <a:effectLst/>
+                <a:latin typeface="Arial" panose="020B0604020202020204" pitchFamily="34" charset="0"/>
+              </a:rPr>
+              <a:t>Ready for deployment in academic environments </a:t>
+            </a:r>
+          </a:p>
+        </p:txBody>
+      </p:sp>
+      <p:pic>
+        <p:nvPicPr>
+          <p:cNvPr id="6" name="Picture 5">
+            <a:extLst>
+              <a:ext uri="{FF2B5EF4-FFF2-40B4-BE49-F238E27FC236}">
+                <a16:creationId xmlns:a16="http://schemas.microsoft.com/office/drawing/2014/main" id="{869C141D-5199-520D-4EFF-827556F522F4}"/>
+              </a:ext>
+            </a:extLst>
+          </p:cNvPr>
+          <p:cNvPicPr>
+            <a:picLocks noChangeAspect="1"/>
+          </p:cNvPicPr>
+          <p:nvPr/>
+        </p:nvPicPr>
+        <p:blipFill>
+          <a:blip r:embed="rId2">
+            <a:extLst>
+              <a:ext uri="{28A0092B-C50C-407E-A947-70E740481C1C}">
+                <a14:useLocalDpi xmlns:a14="http://schemas.microsoft.com/office/drawing/2010/main" val="0"/>
+              </a:ext>
+            </a:extLst>
+          </a:blip>
+          <a:stretch>
+            <a:fillRect/>
+          </a:stretch>
+        </p:blipFill>
+        <p:spPr>
+          <a:xfrm>
+            <a:off x="838200" y="984359"/>
+            <a:ext cx="7202864" cy="4314420"/>
+          </a:xfrm>
+          <a:prstGeom prst="rect">
+            <a:avLst/>
+          </a:prstGeom>
+          <a:ln w="28575">
+            <a:solidFill>
+              <a:schemeClr val="tx1"/>
+            </a:solidFill>
+          </a:ln>
+        </p:spPr>
+      </p:pic>
+    </p:spTree>
+    <p:extLst>
+      <p:ext uri="{BB962C8B-B14F-4D97-AF65-F5344CB8AC3E}">
+        <p14:creationId xmlns:p14="http://schemas.microsoft.com/office/powerpoint/2010/main" val="3337757203"/>
+      </p:ext>
+    </p:extLst>
+  </p:cSld>
+  <p:clrMapOvr>
+    <a:masterClrMapping/>
+  </p:clrMapOvr>
+</p:sld>
+</file>
+
+<file path=ppt/slides/slide9.xml><?xml version="1.0" encoding="utf-8"?>
+<p:sld xmlns:a="http://schemas.openxmlformats.org/drawingml/2006/main" xmlns:r="http://schemas.openxmlformats.org/officeDocument/2006/relationships" xmlns:p="http://schemas.openxmlformats.org/presentationml/2006/main">
+  <p:cSld>
+    <p:spTree>
+      <p:nvGrpSpPr>
+        <p:cNvPr id="1" name=""/>
+        <p:cNvGrpSpPr/>
+        <p:nvPr/>
+      </p:nvGrpSpPr>
+      <p:grpSpPr>
+        <a:xfrm>
+          <a:off x="0" y="0"/>
+          <a:ext cx="0" cy="0"/>
+          <a:chOff x="0" y="0"/>
+          <a:chExt cx="0" cy="0"/>
+        </a:xfrm>
+      </p:grpSpPr>
+      <p:sp>
+        <p:nvSpPr>
+          <p:cNvPr id="2" name="Title 1">
+            <a:extLst>
+              <a:ext uri="{FF2B5EF4-FFF2-40B4-BE49-F238E27FC236}">
                 <a16:creationId xmlns:a16="http://schemas.microsoft.com/office/drawing/2014/main" id="{4B5A5ED1-B2D9-6B9C-2EBB-0B3AD21AE715}"/>
               </a:ext>
             </a:extLst>
@@ -16537,7 +17170,7 @@
             <a:fld id="{BDCDBBEF-AA6C-4BA6-85B2-A17D7F280E38}" type="slidenum">
               <a:rPr lang="en-US" smtClean="0"/>
               <a:pPr/>
-              <a:t>8</a:t>
+              <a:t>9</a:t>
             </a:fld>
             <a:endParaRPr lang="en-US"/>
           </a:p>
